--- a/AutomaTivio/saida/2026-09/pptx/Tivio BVP - Relatório de Gestão - Setembro 2026.pptx
+++ b/AutomaTivio/saida/2026-09/pptx/Tivio BVP - Relatório de Gestão - Setembro 2026.pptx
@@ -4769,8 +4769,8 @@
         </p:nvSpPr>
         <p:spPr>
           <a:xfrm>
-            <a:off x="2667616" y="6052606"/>
-            <a:ext cx="381694" cy="143640"/>
+            <a:off x="2681201" y="6052606"/>
+            <a:ext cx="387960" cy="143640"/>
           </a:xfrm>
           <a:prstGeom prst="rect">
             <a:avLst/>
@@ -4793,7 +4793,7 @@
                 </a:solidFill>
                 <a:latin typeface="Versos"/>
               </a:rPr>
-              <a:t>4,34%</a:t>
+              <a:t>4,38%</a:t>
             </a:r>
           </a:p>
         </p:txBody>
@@ -5103,7 +5103,7 @@
         <p:spPr>
           <a:xfrm>
             <a:off x="2960448" y="8251031"/>
-            <a:ext cx="481449" cy="143640"/>
+            <a:ext cx="482923" cy="143640"/>
           </a:xfrm>
           <a:prstGeom prst="rect">
             <a:avLst/>
@@ -5126,7 +5126,7 @@
                 </a:solidFill>
                 <a:latin typeface="Versos"/>
               </a:rPr>
-              <a:t>42,40%</a:t>
+              <a:t>43,48%</a:t>
             </a:r>
           </a:p>
         </p:txBody>
@@ -5176,8 +5176,8 @@
         </p:nvSpPr>
         <p:spPr>
           <a:xfrm>
-            <a:off x="1551571" y="8515158"/>
-            <a:ext cx="399016" cy="143640"/>
+            <a:off x="1545075" y="8515158"/>
+            <a:ext cx="412530" cy="143640"/>
           </a:xfrm>
           <a:prstGeom prst="rect">
             <a:avLst/>
@@ -5200,7 +5200,7 @@
                 </a:solidFill>
                 <a:latin typeface="Versos"/>
               </a:rPr>
-              <a:t>11,24%</a:t>
+              <a:t>11,38%</a:t>
             </a:r>
           </a:p>
         </p:txBody>
@@ -5250,7 +5250,7 @@
         </p:nvSpPr>
         <p:spPr>
           <a:xfrm>
-            <a:off x="1205229" y="8779286"/>
+            <a:off x="1201449" y="8779286"/>
             <a:ext cx="393979" cy="143640"/>
           </a:xfrm>
           <a:prstGeom prst="rect">
@@ -5324,8 +5324,8 @@
         </p:nvSpPr>
         <p:spPr>
           <a:xfrm>
-            <a:off x="1170736" y="9043413"/>
-            <a:ext cx="391154" cy="143640"/>
+            <a:off x="1179832" y="9043413"/>
+            <a:ext cx="357616" cy="143640"/>
           </a:xfrm>
           <a:prstGeom prst="rect">
             <a:avLst/>
@@ -5348,7 +5348,7 @@
                 </a:solidFill>
                 <a:latin typeface="Versos"/>
               </a:rPr>
-              <a:t>2,82%</a:t>
+              <a:t>3,10%</a:t>
             </a:r>
           </a:p>
         </p:txBody>
@@ -5398,7 +5398,7 @@
         </p:nvSpPr>
         <p:spPr>
           <a:xfrm>
-            <a:off x="1145103" y="9307541"/>
+            <a:off x="1142623" y="9307541"/>
             <a:ext cx="385626" cy="143640"/>
           </a:xfrm>
           <a:prstGeom prst="rect">
@@ -5472,7 +5472,7 @@
         </p:nvSpPr>
         <p:spPr>
           <a:xfrm>
-            <a:off x="1144867" y="9571668"/>
+            <a:off x="1142150" y="9571668"/>
             <a:ext cx="382186" cy="143640"/>
           </a:xfrm>
           <a:prstGeom prst="rect">
@@ -5546,7 +5546,7 @@
         </p:nvSpPr>
         <p:spPr>
           <a:xfrm>
-            <a:off x="1069385" y="9835796"/>
+            <a:off x="1068913" y="9835796"/>
             <a:ext cx="397788" cy="143640"/>
           </a:xfrm>
           <a:prstGeom prst="rect">
@@ -5658,7 +5658,7 @@
         <p:spPr>
           <a:xfrm>
             <a:off x="6752497" y="5524233"/>
-            <a:ext cx="485380" cy="143640"/>
+            <a:ext cx="474692" cy="143640"/>
           </a:xfrm>
           <a:prstGeom prst="rect">
             <a:avLst/>
@@ -5681,7 +5681,7 @@
                 </a:solidFill>
                 <a:latin typeface="Versos"/>
               </a:rPr>
-              <a:t>44,48%</a:t>
+              <a:t>45,05%</a:t>
             </a:r>
           </a:p>
         </p:txBody>
@@ -5731,7 +5731,7 @@
         </p:nvSpPr>
         <p:spPr>
           <a:xfrm>
-            <a:off x="6325593" y="5764500"/>
+            <a:off x="6314962" y="5764500"/>
             <a:ext cx="472972" cy="143640"/>
           </a:xfrm>
           <a:prstGeom prst="rect">
@@ -5805,7 +5805,7 @@
         </p:nvSpPr>
         <p:spPr>
           <a:xfrm>
-            <a:off x="5658660" y="6004648"/>
+            <a:off x="5656415" y="6004648"/>
             <a:ext cx="395454" cy="143640"/>
           </a:xfrm>
           <a:prstGeom prst="rect">
@@ -5879,7 +5879,7 @@
         </p:nvSpPr>
         <p:spPr>
           <a:xfrm>
-            <a:off x="5647083" y="6244914"/>
+            <a:off x="5645193" y="6244914"/>
             <a:ext cx="394717" cy="143640"/>
           </a:xfrm>
           <a:prstGeom prst="rect">
@@ -5953,7 +5953,7 @@
         </p:nvSpPr>
         <p:spPr>
           <a:xfrm>
-            <a:off x="5568176" y="6485062"/>
+            <a:off x="5566995" y="6485062"/>
             <a:ext cx="399262" cy="143640"/>
           </a:xfrm>
           <a:prstGeom prst="rect">
@@ -6027,8 +6027,8 @@
         </p:nvSpPr>
         <p:spPr>
           <a:xfrm>
-            <a:off x="5540771" y="6725328"/>
-            <a:ext cx="361179" cy="143640"/>
+            <a:off x="5548095" y="6725328"/>
+            <a:ext cx="349262" cy="143640"/>
           </a:xfrm>
           <a:prstGeom prst="rect">
             <a:avLst/>
@@ -6051,7 +6051,7 @@
                 </a:solidFill>
                 <a:latin typeface="Versos"/>
               </a:rPr>
-              <a:t>1,84%</a:t>
+              <a:t>2,12%</a:t>
             </a:r>
           </a:p>
         </p:txBody>
@@ -6064,7 +6064,81 @@
         </p:nvSpPr>
         <p:spPr>
           <a:xfrm>
-            <a:off x="3802680" y="6916691"/>
+            <a:off x="3802680" y="6973273"/>
+            <a:ext cx="1603929" cy="120960"/>
+          </a:xfrm>
+          <a:prstGeom prst="rect">
+            <a:avLst/>
+          </a:prstGeom>
+          <a:noFill/>
+        </p:spPr>
+        <p:txBody>
+          <a:bodyPr wrap="none" lIns="0" rIns="0" tIns="0" bIns="0" anchor="t"/>
+          <a:lstStyle/>
+          <a:p>
+            <a:pPr algn="r">
+              <a:lnSpc>
+                <a:spcPts val="890"/>
+              </a:lnSpc>
+            </a:pPr>
+            <a:r>
+              <a:rPr sz="809" b="0" i="0">
+                <a:solidFill>
+                  <a:srgbClr val="222222"/>
+                </a:solidFill>
+                <a:latin typeface="Versos"/>
+              </a:rPr>
+              <a:t>Petróleo e Gás</a:t>
+            </a:r>
+          </a:p>
+        </p:txBody>
+      </p:sp>
+      <p:sp>
+        <p:nvSpPr>
+          <p:cNvPr id="83" name="TextBox 82"/>
+          <p:cNvSpPr txBox="1"/>
+          <p:nvPr/>
+        </p:nvSpPr>
+        <p:spPr>
+          <a:xfrm>
+            <a:off x="5535455" y="6965476"/>
+            <a:ext cx="364618" cy="143640"/>
+          </a:xfrm>
+          <a:prstGeom prst="rect">
+            <a:avLst/>
+          </a:prstGeom>
+          <a:noFill/>
+        </p:spPr>
+        <p:txBody>
+          <a:bodyPr wrap="none" lIns="0" rIns="0" tIns="0" bIns="0" anchor="t"/>
+          <a:lstStyle/>
+          <a:p>
+            <a:pPr algn="l">
+              <a:lnSpc>
+                <a:spcPts val="1142"/>
+              </a:lnSpc>
+            </a:pPr>
+            <a:r>
+              <a:rPr sz="952" b="0" i="0">
+                <a:solidFill>
+                  <a:srgbClr val="111111"/>
+                </a:solidFill>
+                <a:latin typeface="Versos"/>
+              </a:rPr>
+              <a:t>1,68%</a:t>
+            </a:r>
+          </a:p>
+        </p:txBody>
+      </p:sp>
+      <p:sp>
+        <p:nvSpPr>
+          <p:cNvPr id="84" name="TextBox 83"/>
+          <p:cNvSpPr txBox="1"/>
+          <p:nvPr/>
+        </p:nvSpPr>
+        <p:spPr>
+          <a:xfrm>
+            <a:off x="3802680" y="7156957"/>
             <a:ext cx="1542240" cy="234005"/>
           </a:xfrm>
           <a:prstGeom prst="rect">
@@ -6095,13 +6169,13 @@
       </p:sp>
       <p:sp>
         <p:nvSpPr>
-          <p:cNvPr id="83" name="TextBox 82"/>
-          <p:cNvSpPr txBox="1"/>
-          <p:nvPr/>
-        </p:nvSpPr>
-        <p:spPr>
-          <a:xfrm>
-            <a:off x="5523761" y="6965476"/>
+          <p:cNvPr id="85" name="TextBox 84"/>
+          <p:cNvSpPr txBox="1"/>
+          <p:nvPr/>
+        </p:nvSpPr>
+        <p:spPr>
+          <a:xfrm>
+            <a:off x="5523406" y="7205743"/>
             <a:ext cx="352088" cy="143640"/>
           </a:xfrm>
           <a:prstGeom prst="rect">
@@ -6126,80 +6200,6 @@
                 <a:latin typeface="Versos"/>
               </a:rPr>
               <a:t>1,24%</a:t>
-            </a:r>
-          </a:p>
-        </p:txBody>
-      </p:sp>
-      <p:sp>
-        <p:nvSpPr>
-          <p:cNvPr id="84" name="TextBox 83"/>
-          <p:cNvSpPr txBox="1"/>
-          <p:nvPr/>
-        </p:nvSpPr>
-        <p:spPr>
-          <a:xfrm>
-            <a:off x="3802680" y="7213421"/>
-            <a:ext cx="1603929" cy="120960"/>
-          </a:xfrm>
-          <a:prstGeom prst="rect">
-            <a:avLst/>
-          </a:prstGeom>
-          <a:noFill/>
-        </p:spPr>
-        <p:txBody>
-          <a:bodyPr wrap="none" lIns="0" rIns="0" tIns="0" bIns="0" anchor="t"/>
-          <a:lstStyle/>
-          <a:p>
-            <a:pPr algn="r">
-              <a:lnSpc>
-                <a:spcPts val="890"/>
-              </a:lnSpc>
-            </a:pPr>
-            <a:r>
-              <a:rPr sz="809" b="0" i="0">
-                <a:solidFill>
-                  <a:srgbClr val="222222"/>
-                </a:solidFill>
-                <a:latin typeface="Versos"/>
-              </a:rPr>
-              <a:t>Locação de veículos</a:t>
-            </a:r>
-          </a:p>
-        </p:txBody>
-      </p:sp>
-      <p:sp>
-        <p:nvSpPr>
-          <p:cNvPr id="85" name="TextBox 84"/>
-          <p:cNvSpPr txBox="1"/>
-          <p:nvPr/>
-        </p:nvSpPr>
-        <p:spPr>
-          <a:xfrm>
-            <a:off x="5519745" y="7205743"/>
-            <a:ext cx="326535" cy="143640"/>
-          </a:xfrm>
-          <a:prstGeom prst="rect">
-            <a:avLst/>
-          </a:prstGeom>
-          <a:noFill/>
-        </p:spPr>
-        <p:txBody>
-          <a:bodyPr wrap="none" lIns="0" rIns="0" tIns="0" bIns="0" anchor="t"/>
-          <a:lstStyle/>
-          <a:p>
-            <a:pPr algn="l">
-              <a:lnSpc>
-                <a:spcPts val="1142"/>
-              </a:lnSpc>
-            </a:pPr>
-            <a:r>
-              <a:rPr sz="952" b="0" i="0">
-                <a:solidFill>
-                  <a:srgbClr val="111111"/>
-                </a:solidFill>
-                <a:latin typeface="Versos"/>
-              </a:rPr>
-              <a:t>1,10%</a:t>
             </a:r>
           </a:p>
         </p:txBody>
@@ -6236,7 +6236,7 @@
                 </a:solidFill>
                 <a:latin typeface="Versos"/>
               </a:rPr>
-              <a:t>Assistência médica</a:t>
+              <a:t>Locação de veículos</a:t>
             </a:r>
           </a:p>
         </p:txBody>
@@ -6249,8 +6249,8 @@
         </p:nvSpPr>
         <p:spPr>
           <a:xfrm>
-            <a:off x="5519154" y="7445891"/>
-            <a:ext cx="367198" cy="143640"/>
+            <a:off x="5519272" y="7445891"/>
+            <a:ext cx="326535" cy="143640"/>
           </a:xfrm>
           <a:prstGeom prst="rect">
             <a:avLst/>
@@ -6273,7 +6273,7 @@
                 </a:solidFill>
                 <a:latin typeface="Versos"/>
               </a:rPr>
-              <a:t>1,08%</a:t>
+              <a:t>1,10%</a:t>
             </a:r>
           </a:p>
         </p:txBody>
@@ -6310,7 +6310,7 @@
                 </a:solidFill>
                 <a:latin typeface="Versos"/>
               </a:rPr>
-              <a:t>Petróleo e Gás</a:t>
+              <a:t>Indústria e Comércio</a:t>
             </a:r>
           </a:p>
         </p:txBody>
@@ -6323,8 +6323,8 @@
         </p:nvSpPr>
         <p:spPr>
           <a:xfrm>
-            <a:off x="5517382" y="7686157"/>
-            <a:ext cx="359827" cy="143640"/>
+            <a:off x="5519036" y="7686157"/>
+            <a:ext cx="367321" cy="143640"/>
           </a:xfrm>
           <a:prstGeom prst="rect">
             <a:avLst/>
@@ -6347,7 +6347,7 @@
                 </a:solidFill>
                 <a:latin typeface="Versos"/>
               </a:rPr>
-              <a:t>1,02%</a:t>
+              <a:t>1,09%</a:t>
             </a:r>
           </a:p>
         </p:txBody>
@@ -6384,7 +6384,7 @@
                 </a:solidFill>
                 <a:latin typeface="Versos"/>
               </a:rPr>
-              <a:t>Indústria e Comércio</a:t>
+              <a:t>Assistência médica</a:t>
             </a:r>
           </a:p>
         </p:txBody>
@@ -6397,8 +6397,8 @@
         </p:nvSpPr>
         <p:spPr>
           <a:xfrm>
-            <a:off x="5515256" y="7926305"/>
-            <a:ext cx="392014" cy="143640"/>
+            <a:off x="5518800" y="7926305"/>
+            <a:ext cx="367198" cy="143640"/>
           </a:xfrm>
           <a:prstGeom prst="rect">
             <a:avLst/>
@@ -6421,7 +6421,7 @@
                 </a:solidFill>
                 <a:latin typeface="Versos"/>
               </a:rPr>
-              <a:t>0,94%</a:t>
+              <a:t>1,08%</a:t>
             </a:r>
           </a:p>
         </p:txBody>
@@ -6471,7 +6471,7 @@
         </p:nvSpPr>
         <p:spPr>
           <a:xfrm>
-            <a:off x="5508877" y="8166571"/>
+            <a:off x="5508523" y="8166571"/>
             <a:ext cx="383169" cy="143640"/>
           </a:xfrm>
           <a:prstGeom prst="rect">
@@ -6545,7 +6545,7 @@
         </p:nvSpPr>
         <p:spPr>
           <a:xfrm>
-            <a:off x="5508050" y="8406720"/>
+            <a:off x="5507814" y="8406720"/>
             <a:ext cx="398648" cy="143640"/>
           </a:xfrm>
           <a:prstGeom prst="rect">
@@ -6619,7 +6619,7 @@
         </p:nvSpPr>
         <p:spPr>
           <a:xfrm>
-            <a:off x="5501317" y="8646986"/>
+            <a:off x="5501199" y="8646986"/>
             <a:ext cx="394594" cy="143640"/>
           </a:xfrm>
           <a:prstGeom prst="rect">
@@ -6693,7 +6693,7 @@
         </p:nvSpPr>
         <p:spPr>
           <a:xfrm>
-            <a:off x="5500490" y="8887134"/>
+            <a:off x="5500372" y="8887134"/>
             <a:ext cx="395331" cy="143640"/>
           </a:xfrm>
           <a:prstGeom prst="rect">
